--- a/POWER SUPPLY/dBm to Watt.pptx
+++ b/POWER SUPPLY/dBm to Watt.pptx
@@ -113,6 +113,11 @@
       </a:defRPr>
     </a:lvl9pPr>
   </p:defaultTextStyle>
+  <p:extLst>
+    <p:ext uri="{EFAFB233-063F-42B5-8137-9DF3F51BA10A}">
+      <p15:sldGuideLst xmlns:p15="http://schemas.microsoft.com/office/powerpoint/2012/main"/>
+    </p:ext>
+  </p:extLst>
 </p:presentation>
 </file>
 
@@ -263,7 +268,7 @@
           <a:p>
             <a:fld id="{54283A27-A1AD-4FE7-8D65-28689F1F5607}" type="datetimeFigureOut">
               <a:rPr lang="en-US" smtClean="0"/>
-              <a:t>5/20/2025</a:t>
+              <a:t>7/29/2025</a:t>
             </a:fld>
             <a:endParaRPr lang="en-US"/>
           </a:p>
@@ -461,7 +466,7 @@
           <a:p>
             <a:fld id="{54283A27-A1AD-4FE7-8D65-28689F1F5607}" type="datetimeFigureOut">
               <a:rPr lang="en-US" smtClean="0"/>
-              <a:t>5/20/2025</a:t>
+              <a:t>7/29/2025</a:t>
             </a:fld>
             <a:endParaRPr lang="en-US"/>
           </a:p>
@@ -669,7 +674,7 @@
           <a:p>
             <a:fld id="{54283A27-A1AD-4FE7-8D65-28689F1F5607}" type="datetimeFigureOut">
               <a:rPr lang="en-US" smtClean="0"/>
-              <a:t>5/20/2025</a:t>
+              <a:t>7/29/2025</a:t>
             </a:fld>
             <a:endParaRPr lang="en-US"/>
           </a:p>
@@ -867,7 +872,7 @@
           <a:p>
             <a:fld id="{54283A27-A1AD-4FE7-8D65-28689F1F5607}" type="datetimeFigureOut">
               <a:rPr lang="en-US" smtClean="0"/>
-              <a:t>5/20/2025</a:t>
+              <a:t>7/29/2025</a:t>
             </a:fld>
             <a:endParaRPr lang="en-US"/>
           </a:p>
@@ -1142,7 +1147,7 @@
           <a:p>
             <a:fld id="{54283A27-A1AD-4FE7-8D65-28689F1F5607}" type="datetimeFigureOut">
               <a:rPr lang="en-US" smtClean="0"/>
-              <a:t>5/20/2025</a:t>
+              <a:t>7/29/2025</a:t>
             </a:fld>
             <a:endParaRPr lang="en-US"/>
           </a:p>
@@ -1407,7 +1412,7 @@
           <a:p>
             <a:fld id="{54283A27-A1AD-4FE7-8D65-28689F1F5607}" type="datetimeFigureOut">
               <a:rPr lang="en-US" smtClean="0"/>
-              <a:t>5/20/2025</a:t>
+              <a:t>7/29/2025</a:t>
             </a:fld>
             <a:endParaRPr lang="en-US"/>
           </a:p>
@@ -1819,7 +1824,7 @@
           <a:p>
             <a:fld id="{54283A27-A1AD-4FE7-8D65-28689F1F5607}" type="datetimeFigureOut">
               <a:rPr lang="en-US" smtClean="0"/>
-              <a:t>5/20/2025</a:t>
+              <a:t>7/29/2025</a:t>
             </a:fld>
             <a:endParaRPr lang="en-US"/>
           </a:p>
@@ -1960,7 +1965,7 @@
           <a:p>
             <a:fld id="{54283A27-A1AD-4FE7-8D65-28689F1F5607}" type="datetimeFigureOut">
               <a:rPr lang="en-US" smtClean="0"/>
-              <a:t>5/20/2025</a:t>
+              <a:t>7/29/2025</a:t>
             </a:fld>
             <a:endParaRPr lang="en-US"/>
           </a:p>
@@ -2073,7 +2078,7 @@
           <a:p>
             <a:fld id="{54283A27-A1AD-4FE7-8D65-28689F1F5607}" type="datetimeFigureOut">
               <a:rPr lang="en-US" smtClean="0"/>
-              <a:t>5/20/2025</a:t>
+              <a:t>7/29/2025</a:t>
             </a:fld>
             <a:endParaRPr lang="en-US"/>
           </a:p>
@@ -2384,7 +2389,7 @@
           <a:p>
             <a:fld id="{54283A27-A1AD-4FE7-8D65-28689F1F5607}" type="datetimeFigureOut">
               <a:rPr lang="en-US" smtClean="0"/>
-              <a:t>5/20/2025</a:t>
+              <a:t>7/29/2025</a:t>
             </a:fld>
             <a:endParaRPr lang="en-US"/>
           </a:p>
@@ -2672,7 +2677,7 @@
           <a:p>
             <a:fld id="{54283A27-A1AD-4FE7-8D65-28689F1F5607}" type="datetimeFigureOut">
               <a:rPr lang="en-US" smtClean="0"/>
-              <a:t>5/20/2025</a:t>
+              <a:t>7/29/2025</a:t>
             </a:fld>
             <a:endParaRPr lang="en-US"/>
           </a:p>
@@ -2913,7 +2918,7 @@
           <a:p>
             <a:fld id="{54283A27-A1AD-4FE7-8D65-28689F1F5607}" type="datetimeFigureOut">
               <a:rPr lang="en-US" smtClean="0"/>
-              <a:t>5/20/2025</a:t>
+              <a:t>7/29/2025</a:t>
             </a:fld>
             <a:endParaRPr lang="en-US"/>
           </a:p>
@@ -3330,8 +3335,8 @@
           <a:chExt cx="0" cy="0"/>
         </a:xfrm>
       </p:grpSpPr>
-      <mc:AlternateContent xmlns:mc="http://schemas.openxmlformats.org/markup-compatibility/2006">
-        <mc:Choice xmlns:a14="http://schemas.microsoft.com/office/drawing/2010/main" Requires="a14">
+      <mc:AlternateContent xmlns:mc="http://schemas.openxmlformats.org/markup-compatibility/2006" xmlns:a14="http://schemas.microsoft.com/office/drawing/2010/main">
+        <mc:Choice Requires="a14">
           <p:sp>
             <p:nvSpPr>
               <p:cNvPr id="5" name="TextBox 4">
@@ -3485,7 +3490,7 @@
             </p:txBody>
           </p:sp>
         </mc:Choice>
-        <mc:Fallback>
+        <mc:Fallback xmlns="">
           <p:sp>
             <p:nvSpPr>
               <p:cNvPr id="5" name="TextBox 4">
@@ -3649,8 +3654,8 @@
           </a:p>
         </p:txBody>
       </p:sp>
-      <mc:AlternateContent xmlns:mc="http://schemas.openxmlformats.org/markup-compatibility/2006">
-        <mc:Choice xmlns:a14="http://schemas.microsoft.com/office/drawing/2010/main" Requires="a14">
+      <mc:AlternateContent xmlns:mc="http://schemas.openxmlformats.org/markup-compatibility/2006" xmlns:a14="http://schemas.microsoft.com/office/drawing/2010/main">
+        <mc:Choice Requires="a14">
           <p:sp>
             <p:nvSpPr>
               <p:cNvPr id="3" name="TextBox 2">
@@ -3816,7 +3821,7 @@
             </p:txBody>
           </p:sp>
         </mc:Choice>
-        <mc:Fallback>
+        <mc:Fallback xmlns="">
           <p:sp>
             <p:nvSpPr>
               <p:cNvPr id="3" name="TextBox 2">
@@ -4164,8 +4169,8 @@
           </a:p>
         </p:txBody>
       </p:sp>
-      <mc:AlternateContent xmlns:mc="http://schemas.openxmlformats.org/markup-compatibility/2006">
-        <mc:Choice xmlns:a14="http://schemas.microsoft.com/office/drawing/2010/main" Requires="a14">
+      <mc:AlternateContent xmlns:mc="http://schemas.openxmlformats.org/markup-compatibility/2006" xmlns:a14="http://schemas.microsoft.com/office/drawing/2010/main">
+        <mc:Choice Requires="a14">
           <p:sp>
             <p:nvSpPr>
               <p:cNvPr id="3" name="TextBox 2">
@@ -4331,7 +4336,7 @@
             </p:txBody>
           </p:sp>
         </mc:Choice>
-        <mc:Fallback>
+        <mc:Fallback xmlns="">
           <p:sp>
             <p:nvSpPr>
               <p:cNvPr id="3" name="TextBox 2">
@@ -4376,8 +4381,8 @@
           </p:sp>
         </mc:Fallback>
       </mc:AlternateContent>
-      <mc:AlternateContent xmlns:mc="http://schemas.openxmlformats.org/markup-compatibility/2006">
-        <mc:Choice xmlns:a14="http://schemas.microsoft.com/office/drawing/2010/main" Requires="a14">
+      <mc:AlternateContent xmlns:mc="http://schemas.openxmlformats.org/markup-compatibility/2006" xmlns:a14="http://schemas.microsoft.com/office/drawing/2010/main">
+        <mc:Choice Requires="a14">
           <p:sp>
             <p:nvSpPr>
               <p:cNvPr id="6" name="TextBox 5">
@@ -4559,7 +4564,7 @@
             </p:txBody>
           </p:sp>
         </mc:Choice>
-        <mc:Fallback>
+        <mc:Fallback xmlns="">
           <p:sp>
             <p:nvSpPr>
               <p:cNvPr id="6" name="TextBox 5">
@@ -4604,8 +4609,8 @@
           </p:sp>
         </mc:Fallback>
       </mc:AlternateContent>
-      <mc:AlternateContent xmlns:mc="http://schemas.openxmlformats.org/markup-compatibility/2006">
-        <mc:Choice xmlns:a14="http://schemas.microsoft.com/office/drawing/2010/main" Requires="a14">
+      <mc:AlternateContent xmlns:mc="http://schemas.openxmlformats.org/markup-compatibility/2006" xmlns:a14="http://schemas.microsoft.com/office/drawing/2010/main">
+        <mc:Choice Requires="a14">
           <p:sp>
             <p:nvSpPr>
               <p:cNvPr id="8" name="TextBox 7">
@@ -4810,7 +4815,7 @@
             </p:txBody>
           </p:sp>
         </mc:Choice>
-        <mc:Fallback>
+        <mc:Fallback xmlns="">
           <p:sp>
             <p:nvSpPr>
               <p:cNvPr id="8" name="TextBox 7">
@@ -4855,8 +4860,8 @@
           </p:sp>
         </mc:Fallback>
       </mc:AlternateContent>
-      <mc:AlternateContent xmlns:mc="http://schemas.openxmlformats.org/markup-compatibility/2006">
-        <mc:Choice xmlns:a14="http://schemas.microsoft.com/office/drawing/2010/main" Requires="a14">
+      <mc:AlternateContent xmlns:mc="http://schemas.openxmlformats.org/markup-compatibility/2006" xmlns:a14="http://schemas.microsoft.com/office/drawing/2010/main">
+        <mc:Choice Requires="a14">
           <p:sp>
             <p:nvSpPr>
               <p:cNvPr id="9" name="TextBox 8">
@@ -4950,7 +4955,7 @@
             </p:txBody>
           </p:sp>
         </mc:Choice>
-        <mc:Fallback>
+        <mc:Fallback xmlns="">
           <p:sp>
             <p:nvSpPr>
               <p:cNvPr id="9" name="TextBox 8">
@@ -5031,8 +5036,8 @@
           <a:chExt cx="0" cy="0"/>
         </a:xfrm>
       </p:grpSpPr>
-      <mc:AlternateContent xmlns:mc="http://schemas.openxmlformats.org/markup-compatibility/2006">
-        <mc:Choice xmlns:a14="http://schemas.microsoft.com/office/drawing/2010/main" Requires="a14">
+      <mc:AlternateContent xmlns:mc="http://schemas.openxmlformats.org/markup-compatibility/2006" xmlns:a14="http://schemas.microsoft.com/office/drawing/2010/main">
+        <mc:Choice Requires="a14">
           <p:sp>
             <p:nvSpPr>
               <p:cNvPr id="5" name="TextBox 4">
@@ -5186,7 +5191,7 @@
             </p:txBody>
           </p:sp>
         </mc:Choice>
-        <mc:Fallback>
+        <mc:Fallback xmlns="">
           <p:sp>
             <p:nvSpPr>
               <p:cNvPr id="5" name="TextBox 4">
@@ -5344,8 +5349,8 @@
           </a:p>
         </p:txBody>
       </p:sp>
-      <mc:AlternateContent xmlns:mc="http://schemas.openxmlformats.org/markup-compatibility/2006">
-        <mc:Choice xmlns:a14="http://schemas.microsoft.com/office/drawing/2010/main" Requires="a14">
+      <mc:AlternateContent xmlns:mc="http://schemas.openxmlformats.org/markup-compatibility/2006" xmlns:a14="http://schemas.microsoft.com/office/drawing/2010/main">
+        <mc:Choice Requires="a14">
           <p:sp>
             <p:nvSpPr>
               <p:cNvPr id="10" name="TextBox 9">
@@ -5492,7 +5497,7 @@
             </p:txBody>
           </p:sp>
         </mc:Choice>
-        <mc:Fallback>
+        <mc:Fallback xmlns="">
           <p:sp>
             <p:nvSpPr>
               <p:cNvPr id="10" name="TextBox 9">
@@ -5537,8 +5542,8 @@
           </p:sp>
         </mc:Fallback>
       </mc:AlternateContent>
-      <mc:AlternateContent xmlns:mc="http://schemas.openxmlformats.org/markup-compatibility/2006">
-        <mc:Choice xmlns:a14="http://schemas.microsoft.com/office/drawing/2010/main" Requires="a14">
+      <mc:AlternateContent xmlns:mc="http://schemas.openxmlformats.org/markup-compatibility/2006" xmlns:a14="http://schemas.microsoft.com/office/drawing/2010/main">
+        <mc:Choice Requires="a14">
           <p:sp>
             <p:nvSpPr>
               <p:cNvPr id="12" name="TextBox 11">
@@ -5738,7 +5743,7 @@
             </p:txBody>
           </p:sp>
         </mc:Choice>
-        <mc:Fallback>
+        <mc:Fallback xmlns="">
           <p:sp>
             <p:nvSpPr>
               <p:cNvPr id="12" name="TextBox 11">
@@ -6082,8 +6087,8 @@
           </a:p>
         </p:txBody>
       </p:sp>
-      <mc:AlternateContent xmlns:mc="http://schemas.openxmlformats.org/markup-compatibility/2006">
-        <mc:Choice xmlns:a14="http://schemas.microsoft.com/office/drawing/2010/main" Requires="a14">
+      <mc:AlternateContent xmlns:mc="http://schemas.openxmlformats.org/markup-compatibility/2006" xmlns:a14="http://schemas.microsoft.com/office/drawing/2010/main">
+        <mc:Choice Requires="a14">
           <p:sp>
             <p:nvSpPr>
               <p:cNvPr id="12" name="TextBox 11">
@@ -6283,7 +6288,7 @@
             </p:txBody>
           </p:sp>
         </mc:Choice>
-        <mc:Fallback>
+        <mc:Fallback xmlns="">
           <p:sp>
             <p:nvSpPr>
               <p:cNvPr id="12" name="TextBox 11">
@@ -6328,8 +6333,8 @@
           </p:sp>
         </mc:Fallback>
       </mc:AlternateContent>
-      <mc:AlternateContent xmlns:mc="http://schemas.openxmlformats.org/markup-compatibility/2006">
-        <mc:Choice xmlns:a14="http://schemas.microsoft.com/office/drawing/2010/main" Requires="a14">
+      <mc:AlternateContent xmlns:mc="http://schemas.openxmlformats.org/markup-compatibility/2006" xmlns:a14="http://schemas.microsoft.com/office/drawing/2010/main">
+        <mc:Choice Requires="a14">
           <p:sp>
             <p:nvSpPr>
               <p:cNvPr id="8" name="TextBox 7">
@@ -6489,7 +6494,7 @@
             </p:txBody>
           </p:sp>
         </mc:Choice>
-        <mc:Fallback>
+        <mc:Fallback xmlns="">
           <p:sp>
             <p:nvSpPr>
               <p:cNvPr id="8" name="TextBox 7">
@@ -6785,8 +6790,8 @@
           </a:p>
         </p:txBody>
       </p:sp>
-      <mc:AlternateContent xmlns:mc="http://schemas.openxmlformats.org/markup-compatibility/2006">
-        <mc:Choice xmlns:a14="http://schemas.microsoft.com/office/drawing/2010/main" Requires="a14">
+      <mc:AlternateContent xmlns:mc="http://schemas.openxmlformats.org/markup-compatibility/2006" xmlns:a14="http://schemas.microsoft.com/office/drawing/2010/main">
+        <mc:Choice Requires="a14">
           <p:sp>
             <p:nvSpPr>
               <p:cNvPr id="3" name="TextBox 2">
@@ -6952,7 +6957,7 @@
             </p:txBody>
           </p:sp>
         </mc:Choice>
-        <mc:Fallback>
+        <mc:Fallback xmlns="">
           <p:sp>
             <p:nvSpPr>
               <p:cNvPr id="3" name="TextBox 2">
@@ -6997,8 +7002,8 @@
           </p:sp>
         </mc:Fallback>
       </mc:AlternateContent>
-      <mc:AlternateContent xmlns:mc="http://schemas.openxmlformats.org/markup-compatibility/2006">
-        <mc:Choice xmlns:a14="http://schemas.microsoft.com/office/drawing/2010/main" Requires="a14">
+      <mc:AlternateContent xmlns:mc="http://schemas.openxmlformats.org/markup-compatibility/2006" xmlns:a14="http://schemas.microsoft.com/office/drawing/2010/main">
+        <mc:Choice Requires="a14">
           <p:sp>
             <p:nvSpPr>
               <p:cNvPr id="8" name="TextBox 7">
@@ -7158,7 +7163,7 @@
             </p:txBody>
           </p:sp>
         </mc:Choice>
-        <mc:Fallback>
+        <mc:Fallback xmlns="">
           <p:sp>
             <p:nvSpPr>
               <p:cNvPr id="8" name="TextBox 7">
@@ -7631,8 +7636,8 @@
           </a:p>
         </p:txBody>
       </p:sp>
-      <mc:AlternateContent xmlns:mc="http://schemas.openxmlformats.org/markup-compatibility/2006">
-        <mc:Choice xmlns:a14="http://schemas.microsoft.com/office/drawing/2010/main" Requires="a14">
+      <mc:AlternateContent xmlns:mc="http://schemas.openxmlformats.org/markup-compatibility/2006" xmlns:a14="http://schemas.microsoft.com/office/drawing/2010/main">
+        <mc:Choice Requires="a14">
           <p:sp>
             <p:nvSpPr>
               <p:cNvPr id="3" name="TextBox 2">
@@ -7798,7 +7803,7 @@
             </p:txBody>
           </p:sp>
         </mc:Choice>
-        <mc:Fallback>
+        <mc:Fallback xmlns="">
           <p:sp>
             <p:nvSpPr>
               <p:cNvPr id="3" name="TextBox 2">
@@ -7843,8 +7848,8 @@
           </p:sp>
         </mc:Fallback>
       </mc:AlternateContent>
-      <mc:AlternateContent xmlns:mc="http://schemas.openxmlformats.org/markup-compatibility/2006">
-        <mc:Choice xmlns:a14="http://schemas.microsoft.com/office/drawing/2010/main" Requires="a14">
+      <mc:AlternateContent xmlns:mc="http://schemas.openxmlformats.org/markup-compatibility/2006" xmlns:a14="http://schemas.microsoft.com/office/drawing/2010/main">
+        <mc:Choice Requires="a14">
           <p:sp>
             <p:nvSpPr>
               <p:cNvPr id="6" name="TextBox 5">
@@ -8017,7 +8022,7 @@
             </p:txBody>
           </p:sp>
         </mc:Choice>
-        <mc:Fallback>
+        <mc:Fallback xmlns="">
           <p:sp>
             <p:nvSpPr>
               <p:cNvPr id="6" name="TextBox 5">
@@ -8062,8 +8067,8 @@
           </p:sp>
         </mc:Fallback>
       </mc:AlternateContent>
-      <mc:AlternateContent xmlns:mc="http://schemas.openxmlformats.org/markup-compatibility/2006">
-        <mc:Choice xmlns:a14="http://schemas.microsoft.com/office/drawing/2010/main" Requires="a14">
+      <mc:AlternateContent xmlns:mc="http://schemas.openxmlformats.org/markup-compatibility/2006" xmlns:a14="http://schemas.microsoft.com/office/drawing/2010/main">
+        <mc:Choice Requires="a14">
           <p:sp>
             <p:nvSpPr>
               <p:cNvPr id="8" name="TextBox 7">
@@ -8092,7 +8097,6 @@
               </a:bodyPr>
               <a:lstStyle/>
               <a:p>
-                <a:pPr/>
                 <a14:m>
                   <m:oMath xmlns:m="http://schemas.openxmlformats.org/officeDocument/2006/math">
                     <m:r>
@@ -8260,7 +8264,7 @@
             </p:txBody>
           </p:sp>
         </mc:Choice>
-        <mc:Fallback>
+        <mc:Fallback xmlns="">
           <p:sp>
             <p:nvSpPr>
               <p:cNvPr id="8" name="TextBox 7">
@@ -8305,8 +8309,8 @@
           </p:sp>
         </mc:Fallback>
       </mc:AlternateContent>
-      <mc:AlternateContent xmlns:mc="http://schemas.openxmlformats.org/markup-compatibility/2006">
-        <mc:Choice xmlns:a14="http://schemas.microsoft.com/office/drawing/2010/main" Requires="a14">
+      <mc:AlternateContent xmlns:mc="http://schemas.openxmlformats.org/markup-compatibility/2006" xmlns:a14="http://schemas.microsoft.com/office/drawing/2010/main">
+        <mc:Choice Requires="a14">
           <p:sp>
             <p:nvSpPr>
               <p:cNvPr id="9" name="TextBox 8">
@@ -8412,7 +8416,7 @@
             </p:txBody>
           </p:sp>
         </mc:Choice>
-        <mc:Fallback>
+        <mc:Fallback xmlns="">
           <p:sp>
             <p:nvSpPr>
               <p:cNvPr id="9" name="TextBox 8">
@@ -8804,8 +8808,8 @@
           </a:p>
         </p:txBody>
       </p:sp>
-      <mc:AlternateContent xmlns:mc="http://schemas.openxmlformats.org/markup-compatibility/2006">
-        <mc:Choice xmlns:a14="http://schemas.microsoft.com/office/drawing/2010/main" Requires="a14">
+      <mc:AlternateContent xmlns:mc="http://schemas.openxmlformats.org/markup-compatibility/2006" xmlns:a14="http://schemas.microsoft.com/office/drawing/2010/main">
+        <mc:Choice Requires="a14">
           <p:sp>
             <p:nvSpPr>
               <p:cNvPr id="3" name="TextBox 2">
@@ -8971,7 +8975,7 @@
             </p:txBody>
           </p:sp>
         </mc:Choice>
-        <mc:Fallback>
+        <mc:Fallback xmlns="">
           <p:sp>
             <p:nvSpPr>
               <p:cNvPr id="3" name="TextBox 2">
@@ -9016,8 +9020,8 @@
           </p:sp>
         </mc:Fallback>
       </mc:AlternateContent>
-      <mc:AlternateContent xmlns:mc="http://schemas.openxmlformats.org/markup-compatibility/2006">
-        <mc:Choice xmlns:a14="http://schemas.microsoft.com/office/drawing/2010/main" Requires="a14">
+      <mc:AlternateContent xmlns:mc="http://schemas.openxmlformats.org/markup-compatibility/2006" xmlns:a14="http://schemas.microsoft.com/office/drawing/2010/main">
+        <mc:Choice Requires="a14">
           <p:sp>
             <p:nvSpPr>
               <p:cNvPr id="6" name="TextBox 5">
@@ -9190,7 +9194,7 @@
             </p:txBody>
           </p:sp>
         </mc:Choice>
-        <mc:Fallback>
+        <mc:Fallback xmlns="">
           <p:sp>
             <p:nvSpPr>
               <p:cNvPr id="6" name="TextBox 5">
@@ -9235,8 +9239,8 @@
           </p:sp>
         </mc:Fallback>
       </mc:AlternateContent>
-      <mc:AlternateContent xmlns:mc="http://schemas.openxmlformats.org/markup-compatibility/2006">
-        <mc:Choice xmlns:a14="http://schemas.microsoft.com/office/drawing/2010/main" Requires="a14">
+      <mc:AlternateContent xmlns:mc="http://schemas.openxmlformats.org/markup-compatibility/2006" xmlns:a14="http://schemas.microsoft.com/office/drawing/2010/main">
+        <mc:Choice Requires="a14">
           <p:sp>
             <p:nvSpPr>
               <p:cNvPr id="8" name="TextBox 7">
@@ -9432,7 +9436,7 @@
             </p:txBody>
           </p:sp>
         </mc:Choice>
-        <mc:Fallback>
+        <mc:Fallback xmlns="">
           <p:sp>
             <p:nvSpPr>
               <p:cNvPr id="8" name="TextBox 7">
@@ -9477,8 +9481,8 @@
           </p:sp>
         </mc:Fallback>
       </mc:AlternateContent>
-      <mc:AlternateContent xmlns:mc="http://schemas.openxmlformats.org/markup-compatibility/2006">
-        <mc:Choice xmlns:a14="http://schemas.microsoft.com/office/drawing/2010/main" Requires="a14">
+      <mc:AlternateContent xmlns:mc="http://schemas.openxmlformats.org/markup-compatibility/2006" xmlns:a14="http://schemas.microsoft.com/office/drawing/2010/main">
+        <mc:Choice Requires="a14">
           <p:sp>
             <p:nvSpPr>
               <p:cNvPr id="9" name="TextBox 8">
@@ -9584,7 +9588,7 @@
             </p:txBody>
           </p:sp>
         </mc:Choice>
-        <mc:Fallback>
+        <mc:Fallback xmlns="">
           <p:sp>
             <p:nvSpPr>
               <p:cNvPr id="9" name="TextBox 8">
@@ -9740,8 +9744,8 @@
           </a:p>
         </p:txBody>
       </p:sp>
-      <mc:AlternateContent xmlns:mc="http://schemas.openxmlformats.org/markup-compatibility/2006">
-        <mc:Choice xmlns:a14="http://schemas.microsoft.com/office/drawing/2010/main" Requires="a14">
+      <mc:AlternateContent xmlns:mc="http://schemas.openxmlformats.org/markup-compatibility/2006" xmlns:a14="http://schemas.microsoft.com/office/drawing/2010/main">
+        <mc:Choice Requires="a14">
           <p:sp>
             <p:nvSpPr>
               <p:cNvPr id="3" name="TextBox 2">
@@ -9907,7 +9911,7 @@
             </p:txBody>
           </p:sp>
         </mc:Choice>
-        <mc:Fallback>
+        <mc:Fallback xmlns="">
           <p:sp>
             <p:nvSpPr>
               <p:cNvPr id="3" name="TextBox 2">
@@ -9952,8 +9956,8 @@
           </p:sp>
         </mc:Fallback>
       </mc:AlternateContent>
-      <mc:AlternateContent xmlns:mc="http://schemas.openxmlformats.org/markup-compatibility/2006">
-        <mc:Choice xmlns:a14="http://schemas.microsoft.com/office/drawing/2010/main" Requires="a14">
+      <mc:AlternateContent xmlns:mc="http://schemas.openxmlformats.org/markup-compatibility/2006" xmlns:a14="http://schemas.microsoft.com/office/drawing/2010/main">
+        <mc:Choice Requires="a14">
           <p:sp>
             <p:nvSpPr>
               <p:cNvPr id="6" name="TextBox 5">
@@ -10126,7 +10130,7 @@
             </p:txBody>
           </p:sp>
         </mc:Choice>
-        <mc:Fallback>
+        <mc:Fallback xmlns="">
           <p:sp>
             <p:nvSpPr>
               <p:cNvPr id="6" name="TextBox 5">
@@ -10171,8 +10175,8 @@
           </p:sp>
         </mc:Fallback>
       </mc:AlternateContent>
-      <mc:AlternateContent xmlns:mc="http://schemas.openxmlformats.org/markup-compatibility/2006">
-        <mc:Choice xmlns:a14="http://schemas.microsoft.com/office/drawing/2010/main" Requires="a14">
+      <mc:AlternateContent xmlns:mc="http://schemas.openxmlformats.org/markup-compatibility/2006" xmlns:a14="http://schemas.microsoft.com/office/drawing/2010/main">
+        <mc:Choice Requires="a14">
           <p:sp>
             <p:nvSpPr>
               <p:cNvPr id="8" name="TextBox 7">
@@ -10368,7 +10372,7 @@
             </p:txBody>
           </p:sp>
         </mc:Choice>
-        <mc:Fallback>
+        <mc:Fallback xmlns="">
           <p:sp>
             <p:nvSpPr>
               <p:cNvPr id="8" name="TextBox 7">
@@ -10413,8 +10417,8 @@
           </p:sp>
         </mc:Fallback>
       </mc:AlternateContent>
-      <mc:AlternateContent xmlns:mc="http://schemas.openxmlformats.org/markup-compatibility/2006">
-        <mc:Choice xmlns:a14="http://schemas.microsoft.com/office/drawing/2010/main" Requires="a14">
+      <mc:AlternateContent xmlns:mc="http://schemas.openxmlformats.org/markup-compatibility/2006" xmlns:a14="http://schemas.microsoft.com/office/drawing/2010/main">
+        <mc:Choice Requires="a14">
           <p:sp>
             <p:nvSpPr>
               <p:cNvPr id="9" name="TextBox 8">
@@ -10517,7 +10521,7 @@
             </p:txBody>
           </p:sp>
         </mc:Choice>
-        <mc:Fallback>
+        <mc:Fallback xmlns="">
           <p:sp>
             <p:nvSpPr>
               <p:cNvPr id="9" name="TextBox 8">
@@ -10909,8 +10913,8 @@
           </a:p>
         </p:txBody>
       </p:sp>
-      <mc:AlternateContent xmlns:mc="http://schemas.openxmlformats.org/markup-compatibility/2006">
-        <mc:Choice xmlns:a14="http://schemas.microsoft.com/office/drawing/2010/main" Requires="a14">
+      <mc:AlternateContent xmlns:mc="http://schemas.openxmlformats.org/markup-compatibility/2006" xmlns:a14="http://schemas.microsoft.com/office/drawing/2010/main">
+        <mc:Choice Requires="a14">
           <p:sp>
             <p:nvSpPr>
               <p:cNvPr id="3" name="TextBox 2">
@@ -11076,7 +11080,7 @@
             </p:txBody>
           </p:sp>
         </mc:Choice>
-        <mc:Fallback>
+        <mc:Fallback xmlns="">
           <p:sp>
             <p:nvSpPr>
               <p:cNvPr id="3" name="TextBox 2">
@@ -11121,8 +11125,8 @@
           </p:sp>
         </mc:Fallback>
       </mc:AlternateContent>
-      <mc:AlternateContent xmlns:mc="http://schemas.openxmlformats.org/markup-compatibility/2006">
-        <mc:Choice xmlns:a14="http://schemas.microsoft.com/office/drawing/2010/main" Requires="a14">
+      <mc:AlternateContent xmlns:mc="http://schemas.openxmlformats.org/markup-compatibility/2006" xmlns:a14="http://schemas.microsoft.com/office/drawing/2010/main">
+        <mc:Choice Requires="a14">
           <p:sp>
             <p:nvSpPr>
               <p:cNvPr id="6" name="TextBox 5">
@@ -11241,16 +11245,7 @@
                                       </a:solidFill>
                                       <a:latin typeface="Cambria Math" panose="02040503050406030204" pitchFamily="18" charset="0"/>
                                     </a:rPr>
-                                    <m:t>7</m:t>
-                                  </m:r>
-                                  <m:r>
-                                    <a:rPr lang="en-US" sz="3600" b="0" i="0" smtClean="0">
-                                      <a:solidFill>
-                                        <a:schemeClr val="tx1"/>
-                                      </a:solidFill>
-                                      <a:latin typeface="Cambria Math" panose="02040503050406030204" pitchFamily="18" charset="0"/>
-                                    </a:rPr>
-                                    <m:t>0</m:t>
+                                    <m:t>70</m:t>
                                   </m:r>
                                   <m:r>
                                     <a:rPr lang="en-US" sz="3600" b="0" i="0" smtClean="0">
@@ -11304,7 +11299,7 @@
             </p:txBody>
           </p:sp>
         </mc:Choice>
-        <mc:Fallback>
+        <mc:Fallback xmlns="">
           <p:sp>
             <p:nvSpPr>
               <p:cNvPr id="6" name="TextBox 5">
@@ -11349,8 +11344,8 @@
           </p:sp>
         </mc:Fallback>
       </mc:AlternateContent>
-      <mc:AlternateContent xmlns:mc="http://schemas.openxmlformats.org/markup-compatibility/2006">
-        <mc:Choice xmlns:a14="http://schemas.microsoft.com/office/drawing/2010/main" Requires="a14">
+      <mc:AlternateContent xmlns:mc="http://schemas.openxmlformats.org/markup-compatibility/2006" xmlns:a14="http://schemas.microsoft.com/office/drawing/2010/main">
+        <mc:Choice Requires="a14">
           <p:sp>
             <p:nvSpPr>
               <p:cNvPr id="8" name="TextBox 7">
@@ -11379,7 +11374,6 @@
               </a:bodyPr>
               <a:lstStyle/>
               <a:p>
-                <a:pPr/>
                 <a14:m>
                   <m:oMath xmlns:m="http://schemas.openxmlformats.org/officeDocument/2006/math">
                     <m:r>
@@ -11547,7 +11541,7 @@
             </p:txBody>
           </p:sp>
         </mc:Choice>
-        <mc:Fallback>
+        <mc:Fallback xmlns="">
           <p:sp>
             <p:nvSpPr>
               <p:cNvPr id="8" name="TextBox 7">
@@ -11592,8 +11586,8 @@
           </p:sp>
         </mc:Fallback>
       </mc:AlternateContent>
-      <mc:AlternateContent xmlns:mc="http://schemas.openxmlformats.org/markup-compatibility/2006">
-        <mc:Choice xmlns:a14="http://schemas.microsoft.com/office/drawing/2010/main" Requires="a14">
+      <mc:AlternateContent xmlns:mc="http://schemas.openxmlformats.org/markup-compatibility/2006" xmlns:a14="http://schemas.microsoft.com/office/drawing/2010/main">
+        <mc:Choice Requires="a14">
           <p:sp>
             <p:nvSpPr>
               <p:cNvPr id="9" name="TextBox 8">
@@ -11696,7 +11690,7 @@
             </p:txBody>
           </p:sp>
         </mc:Choice>
-        <mc:Fallback>
+        <mc:Fallback xmlns="">
           <p:sp>
             <p:nvSpPr>
               <p:cNvPr id="9" name="TextBox 8">
@@ -11852,8 +11846,8 @@
           </a:p>
         </p:txBody>
       </p:sp>
-      <mc:AlternateContent xmlns:mc="http://schemas.openxmlformats.org/markup-compatibility/2006">
-        <mc:Choice xmlns:a14="http://schemas.microsoft.com/office/drawing/2010/main" Requires="a14">
+      <mc:AlternateContent xmlns:mc="http://schemas.openxmlformats.org/markup-compatibility/2006" xmlns:a14="http://schemas.microsoft.com/office/drawing/2010/main">
+        <mc:Choice Requires="a14">
           <p:sp>
             <p:nvSpPr>
               <p:cNvPr id="3" name="TextBox 2">
@@ -12019,7 +12013,7 @@
             </p:txBody>
           </p:sp>
         </mc:Choice>
-        <mc:Fallback>
+        <mc:Fallback xmlns="">
           <p:sp>
             <p:nvSpPr>
               <p:cNvPr id="3" name="TextBox 2">
@@ -12064,8 +12058,8 @@
           </p:sp>
         </mc:Fallback>
       </mc:AlternateContent>
-      <mc:AlternateContent xmlns:mc="http://schemas.openxmlformats.org/markup-compatibility/2006">
-        <mc:Choice xmlns:a14="http://schemas.microsoft.com/office/drawing/2010/main" Requires="a14">
+      <mc:AlternateContent xmlns:mc="http://schemas.openxmlformats.org/markup-compatibility/2006" xmlns:a14="http://schemas.microsoft.com/office/drawing/2010/main">
+        <mc:Choice Requires="a14">
           <p:sp>
             <p:nvSpPr>
               <p:cNvPr id="6" name="TextBox 5">
@@ -12247,7 +12241,7 @@
             </p:txBody>
           </p:sp>
         </mc:Choice>
-        <mc:Fallback>
+        <mc:Fallback xmlns="">
           <p:sp>
             <p:nvSpPr>
               <p:cNvPr id="6" name="TextBox 5">
@@ -12292,8 +12286,8 @@
           </p:sp>
         </mc:Fallback>
       </mc:AlternateContent>
-      <mc:AlternateContent xmlns:mc="http://schemas.openxmlformats.org/markup-compatibility/2006">
-        <mc:Choice xmlns:a14="http://schemas.microsoft.com/office/drawing/2010/main" Requires="a14">
+      <mc:AlternateContent xmlns:mc="http://schemas.openxmlformats.org/markup-compatibility/2006" xmlns:a14="http://schemas.microsoft.com/office/drawing/2010/main">
+        <mc:Choice Requires="a14">
           <p:sp>
             <p:nvSpPr>
               <p:cNvPr id="8" name="TextBox 7">
@@ -12498,7 +12492,7 @@
             </p:txBody>
           </p:sp>
         </mc:Choice>
-        <mc:Fallback>
+        <mc:Fallback xmlns="">
           <p:sp>
             <p:nvSpPr>
               <p:cNvPr id="8" name="TextBox 7">
@@ -12543,8 +12537,8 @@
           </p:sp>
         </mc:Fallback>
       </mc:AlternateContent>
-      <mc:AlternateContent xmlns:mc="http://schemas.openxmlformats.org/markup-compatibility/2006">
-        <mc:Choice xmlns:a14="http://schemas.microsoft.com/office/drawing/2010/main" Requires="a14">
+      <mc:AlternateContent xmlns:mc="http://schemas.openxmlformats.org/markup-compatibility/2006" xmlns:a14="http://schemas.microsoft.com/office/drawing/2010/main">
+        <mc:Choice Requires="a14">
           <p:sp>
             <p:nvSpPr>
               <p:cNvPr id="9" name="TextBox 8">
@@ -12616,13 +12610,7 @@
                         <a:rPr lang="en-US" sz="3600" b="0" i="1" smtClean="0">
                           <a:latin typeface="Cambria Math" panose="02040503050406030204" pitchFamily="18" charset="0"/>
                         </a:rPr>
-                        <m:t>0.</m:t>
-                      </m:r>
-                      <m:r>
-                        <a:rPr lang="en-US" sz="3600" b="0" i="1" smtClean="0">
-                          <a:latin typeface="Cambria Math" panose="02040503050406030204" pitchFamily="18" charset="0"/>
-                        </a:rPr>
-                        <m:t>1</m:t>
+                        <m:t>0.1</m:t>
                       </m:r>
                       <m:r>
                         <a:rPr lang="en-US" sz="3600" b="0" i="1" smtClean="0">
@@ -12644,7 +12632,7 @@
             </p:txBody>
           </p:sp>
         </mc:Choice>
-        <mc:Fallback>
+        <mc:Fallback xmlns="">
           <p:sp>
             <p:nvSpPr>
               <p:cNvPr id="9" name="TextBox 8">
